--- a/decks/geog-living-world/geog-living-world_ch3_rainforest-characteristics.pptx
+++ b/decks/geog-living-world/geog-living-world_ch3_rainforest-characteristics.pptx
@@ -125,30 +125,30 @@
   <p:extLst>
     <p:ext uri="{521415D9-36F7-43E2-AB2F-B90AF26B5E84}">
       <p14:sectionLst xmlns:p14="http://schemas.microsoft.com/office/powerpoint/2010/main">
-        <p14:section name="Opening" id="{83544e8a-017a-e7ff-b675-7f076020c23f}">
+        <p14:section name="Opening" id="{76bd7a96-bc9e-c658-cdbe-da0c19863bca}">
           <p14:sldIdLst>
             <p14:sldId id="256"/>
           </p14:sldIdLst>
         </p14:section>
-        <p14:section name="Gate" id="{3c87a674-d611-c8da-5019-2a1f44dcdc83}">
+        <p14:section name="Gate" id="{4eb269ea-ab4e-5778-6233-bb6a8fef6214}">
           <p14:sldIdLst>
             <p14:sldId id="257"/>
             <p14:sldId id="258"/>
           </p14:sldIdLst>
         </p14:section>
-        <p14:section name="Pre-teach" id="{8171ae1d-bf6f-4b12-443a-f150c46739c9}">
+        <p14:section name="Pre-teach" id="{b74ede79-d0ac-48a9-573d-255b56a15f62}">
           <p14:sldIdLst>
             <p14:sldId id="259"/>
             <p14:sldId id="260"/>
           </p14:sldIdLst>
         </p14:section>
-        <p14:section name="Read-along" id="{77cd0cb5-c188-072d-cf7a-9cf12dbec554}">
+        <p14:section name="Read-along" id="{ffcb275e-7cbe-b374-6238-2a54cd7a6def}">
           <p14:sldIdLst>
             <p14:sldId id="261"/>
             <p14:sldId id="262"/>
           </p14:sldIdLst>
         </p14:section>
-        <p14:section name="Teach" id="{ae91d3da-4efe-3996-22d6-cf2a6b55a561}">
+        <p14:section name="Teach" id="{e51ef3cf-64ad-c735-200b-49fbdf5c4b89}">
           <p14:sldIdLst>
             <p14:sldId id="263"/>
             <p14:sldId id="264"/>
@@ -157,19 +157,19 @@
             <p14:sldId id="267"/>
           </p14:sldIdLst>
         </p14:section>
-        <p14:section name="Routes" id="{54093622-ff84-fc50-4442-ef0a69d21190}">
+        <p14:section name="Routes" id="{9653e372-2884-af8e-d114-d396665909e5}">
           <p14:sldIdLst>
             <p14:sldId id="268"/>
             <p14:sldId id="269"/>
             <p14:sldId id="270"/>
           </p14:sldIdLst>
         </p14:section>
-        <p14:section name="Close" id="{69dfe4e4-5a7c-c29f-8e0e-7cf124f27b20}">
+        <p14:section name="Close" id="{1b250d3a-10eb-4e14-e03e-3d5610557817}">
           <p14:sldIdLst>
             <p14:sldId id="271"/>
           </p14:sldIdLst>
         </p14:section>
-        <p14:section name="Answers" id="{f4d1e449-3b22-3e11-9f92-ddaa082e61f9}">
+        <p14:section name="Answers" id="{3da11976-94a4-50dc-2476-4493f0034e6e}">
           <p14:sldIdLst>
             <p14:sldId id="272"/>
             <p14:sldId id="273"/>
